--- a/papers/2020/sgdbias/20201127_opt_poster.pptx
+++ b/papers/2020/sgdbias/20201127_opt_poster.pptx
@@ -128,12 +128,12 @@
   <pc:docChgLst>
     <pc:chgData name="Jingfeng Wu" userId="dbe85c2a-e248-4c4d-b554-7f78c7d699f3" providerId="ADAL" clId="{97CDBAA2-DB00-D04B-802D-D0B5D559F907}"/>
     <pc:docChg chg="undo custSel modSld modMainMaster modNotesMaster">
-      <pc:chgData name="Jingfeng Wu" userId="dbe85c2a-e248-4c4d-b554-7f78c7d699f3" providerId="ADAL" clId="{97CDBAA2-DB00-D04B-802D-D0B5D559F907}" dt="2020-11-28T01:07:00.628" v="1251"/>
+      <pc:chgData name="Jingfeng Wu" userId="dbe85c2a-e248-4c4d-b554-7f78c7d699f3" providerId="ADAL" clId="{97CDBAA2-DB00-D04B-802D-D0B5D559F907}" dt="2020-11-28T01:33:38.541" v="1255" actId="14100"/>
       <pc:docMkLst>
         <pc:docMk/>
       </pc:docMkLst>
       <pc:sldChg chg="addSp delSp modSp mod modNotes">
-        <pc:chgData name="Jingfeng Wu" userId="dbe85c2a-e248-4c4d-b554-7f78c7d699f3" providerId="ADAL" clId="{97CDBAA2-DB00-D04B-802D-D0B5D559F907}" dt="2020-11-28T01:07:00.628" v="1251"/>
+        <pc:chgData name="Jingfeng Wu" userId="dbe85c2a-e248-4c4d-b554-7f78c7d699f3" providerId="ADAL" clId="{97CDBAA2-DB00-D04B-802D-D0B5D559F907}" dt="2020-11-28T01:33:38.541" v="1255" actId="14100"/>
         <pc:sldMkLst>
           <pc:docMk/>
           <pc:sldMk cId="671970020" sldId="256"/>
@@ -211,7 +211,7 @@
           </ac:spMkLst>
         </pc:spChg>
         <pc:spChg chg="add mod">
-          <ac:chgData name="Jingfeng Wu" userId="dbe85c2a-e248-4c4d-b554-7f78c7d699f3" providerId="ADAL" clId="{97CDBAA2-DB00-D04B-802D-D0B5D559F907}" dt="2020-11-28T01:07:00.628" v="1251"/>
+          <ac:chgData name="Jingfeng Wu" userId="dbe85c2a-e248-4c4d-b554-7f78c7d699f3" providerId="ADAL" clId="{97CDBAA2-DB00-D04B-802D-D0B5D559F907}" dt="2020-11-28T01:33:38.541" v="1255" actId="14100"/>
           <ac:spMkLst>
             <pc:docMk/>
             <pc:sldMk cId="671970020" sldId="256"/>
@@ -4662,8 +4662,8 @@
           </a:p>
         </p:txBody>
       </p:sp>
-      <mc:AlternateContent xmlns:mc="http://schemas.openxmlformats.org/markup-compatibility/2006">
-        <mc:Choice xmlns:a14="http://schemas.microsoft.com/office/drawing/2010/main" Requires="a14">
+      <mc:AlternateContent xmlns:mc="http://schemas.openxmlformats.org/markup-compatibility/2006" xmlns:a14="http://schemas.microsoft.com/office/drawing/2010/main">
+        <mc:Choice Requires="a14">
           <p:sp>
             <p:nvSpPr>
               <p:cNvPr id="16" name="Rectangle 15">
@@ -5165,7 +5165,7 @@
             </p:txBody>
           </p:sp>
         </mc:Choice>
-        <mc:Fallback>
+        <mc:Fallback xmlns="">
           <p:sp>
             <p:nvSpPr>
               <p:cNvPr id="16" name="Rectangle 15">
@@ -5229,14 +5229,14 @@
         </p:nvGrpSpPr>
         <p:grpSpPr>
           <a:xfrm>
-            <a:off x="3724131" y="1785654"/>
-            <a:ext cx="5011555" cy="4933333"/>
-            <a:chOff x="2778815" y="1193503"/>
-            <a:chExt cx="3915277" cy="3854166"/>
+            <a:off x="3729010" y="1817525"/>
+            <a:ext cx="5006675" cy="4901463"/>
+            <a:chOff x="2782627" y="1218402"/>
+            <a:chExt cx="3911465" cy="3829267"/>
           </a:xfrm>
         </p:grpSpPr>
-        <mc:AlternateContent xmlns:mc="http://schemas.openxmlformats.org/markup-compatibility/2006">
-          <mc:Choice xmlns:a14="http://schemas.microsoft.com/office/drawing/2010/main" Requires="a14">
+        <mc:AlternateContent xmlns:mc="http://schemas.openxmlformats.org/markup-compatibility/2006" xmlns:a14="http://schemas.microsoft.com/office/drawing/2010/main">
+          <mc:Choice Requires="a14">
             <p:sp>
               <p:nvSpPr>
                 <p:cNvPr id="11" name="TextBox 10">
@@ -5981,7 +5981,7 @@
               </p:txBody>
             </p:sp>
           </mc:Choice>
-          <mc:Fallback>
+          <mc:Fallback xmlns="">
             <p:sp>
               <p:nvSpPr>
                 <p:cNvPr id="11" name="TextBox 10">
@@ -6031,8 +6031,8 @@
             </p:sp>
           </mc:Fallback>
         </mc:AlternateContent>
-        <mc:AlternateContent xmlns:mc="http://schemas.openxmlformats.org/markup-compatibility/2006">
-          <mc:Choice xmlns:a14="http://schemas.microsoft.com/office/drawing/2010/main" Requires="a14">
+        <mc:AlternateContent xmlns:mc="http://schemas.openxmlformats.org/markup-compatibility/2006" xmlns:a14="http://schemas.microsoft.com/office/drawing/2010/main">
+          <mc:Choice Requires="a14">
             <p:sp>
               <p:nvSpPr>
                 <p:cNvPr id="12" name="TextBox 11">
@@ -6560,7 +6560,7 @@
               </p:txBody>
             </p:sp>
           </mc:Choice>
-          <mc:Fallback>
+          <mc:Fallback xmlns="">
             <p:sp>
               <p:nvSpPr>
                 <p:cNvPr id="12" name="TextBox 11">
@@ -6610,8 +6610,8 @@
             </p:sp>
           </mc:Fallback>
         </mc:AlternateContent>
-        <mc:AlternateContent xmlns:mc="http://schemas.openxmlformats.org/markup-compatibility/2006">
-          <mc:Choice xmlns:a14="http://schemas.microsoft.com/office/drawing/2010/main" Requires="a14">
+        <mc:AlternateContent xmlns:mc="http://schemas.openxmlformats.org/markup-compatibility/2006" xmlns:a14="http://schemas.microsoft.com/office/drawing/2010/main">
+          <mc:Choice Requires="a14">
             <p:sp>
               <p:nvSpPr>
                 <p:cNvPr id="14" name="TextBox 13">
@@ -7155,7 +7155,7 @@
               </p:txBody>
             </p:sp>
           </mc:Choice>
-          <mc:Fallback>
+          <mc:Fallback xmlns="">
             <p:sp>
               <p:nvSpPr>
                 <p:cNvPr id="14" name="TextBox 13">
@@ -7221,8 +7221,8 @@
               </p:nvSpPr>
               <p:spPr>
                 <a:xfrm>
-                  <a:off x="2778815" y="1193503"/>
-                  <a:ext cx="3915276" cy="721502"/>
+                  <a:off x="2782627" y="1218402"/>
+                  <a:ext cx="3910966" cy="721502"/>
                 </a:xfrm>
                 <a:prstGeom prst="rect">
                   <a:avLst/>
@@ -7798,8 +7798,8 @@
               </p:nvSpPr>
               <p:spPr>
                 <a:xfrm>
-                  <a:off x="2778815" y="1193503"/>
-                  <a:ext cx="3915276" cy="721502"/>
+                  <a:off x="2782627" y="1218402"/>
+                  <a:ext cx="3910966" cy="721502"/>
                 </a:xfrm>
                 <a:prstGeom prst="rect">
                   <a:avLst/>
@@ -7807,7 +7807,7 @@
                 <a:blipFill>
                   <a:blip r:embed="rId10"/>
                   <a:stretch>
-                    <a:fillRect b="-3947"/>
+                    <a:fillRect b="-4000"/>
                   </a:stretch>
                 </a:blipFill>
                 <a:ln w="25400">
